--- a/decks/englang-p1/englang-p1_ch6_q5-writing.pptx
+++ b/decks/englang-p1/englang-p1_ch6_q5-writing.pptx
@@ -125,37 +125,37 @@
   <p:extLst>
     <p:ext uri="{521415D9-36F7-43E2-AB2F-B90AF26B5E84}">
       <p14:sectionLst xmlns:p14="http://schemas.microsoft.com/office/powerpoint/2010/main">
-        <p14:section name="Opening" id="{0ab68f8b-74f4-5e39-bc85-f5213bfb85fc}">
+        <p14:section name="Opening" id="{c5080207-5293-5729-a667-b10db4f66367}">
           <p14:sldIdLst>
             <p14:sldId id="256"/>
           </p14:sldIdLst>
         </p14:section>
-        <p14:section name="Gate" id="{759c5266-4ccb-2148-65d4-d3a29c286693}">
+        <p14:section name="Gate" id="{bcc75b28-67fa-6508-0299-8fcc9374f2e2}">
           <p14:sldIdLst>
             <p14:sldId id="257"/>
             <p14:sldId id="258"/>
           </p14:sldIdLst>
         </p14:section>
-        <p14:section name="Pre-teach" id="{9066947d-4d2c-fa66-563c-c4c1c7f88f59}">
+        <p14:section name="Pre-teach" id="{c7816925-5b99-a76b-4fd1-383ce7b2369d}">
           <p14:sldIdLst>
             <p14:sldId id="259"/>
             <p14:sldId id="260"/>
           </p14:sldIdLst>
         </p14:section>
-        <p14:section name="Read-along" id="{4010cca2-e91f-e8f2-949e-0e606da6531c}">
+        <p14:section name="Read-along" id="{a8247fda-7016-6b96-6f9f-10c64f473008}">
           <p14:sldIdLst>
             <p14:sldId id="261"/>
             <p14:sldId id="262"/>
           </p14:sldIdLst>
         </p14:section>
-        <p14:section name="Teach" id="{c73114fb-a71f-1a54-3835-3d97168c69b7}">
+        <p14:section name="Teach" id="{056a79ff-39be-808e-b58d-2f7b44ade858}">
           <p14:sldIdLst>
             <p14:sldId id="263"/>
             <p14:sldId id="264"/>
             <p14:sldId id="265"/>
           </p14:sldIdLst>
         </p14:section>
-        <p14:section name="Routes" id="{f2a96aa3-2efc-f703-8fcd-8d0747bc5640}">
+        <p14:section name="Routes" id="{3b49e4fe-a53f-c3e1-4e49-8f43e89eb82e}">
           <p14:sldIdLst>
             <p14:sldId id="266"/>
             <p14:sldId id="267"/>
@@ -163,12 +163,12 @@
             <p14:sldId id="269"/>
           </p14:sldIdLst>
         </p14:section>
-        <p14:section name="Close" id="{c7625900-4b7b-dc88-19c4-4b596d49add0}">
+        <p14:section name="Close" id="{75345b53-602a-1c4f-6e60-614cdcf99043}">
           <p14:sldIdLst>
             <p14:sldId id="270"/>
           </p14:sldIdLst>
         </p14:section>
-        <p14:section name="Answers" id="{ce91a270-55ce-16f4-2d0e-606fc90c1cec}">
+        <p14:section name="Answers" id="{6c6be2f5-adb1-01aa-da73-756c159d4043}">
           <p14:sldIdLst>
             <p14:sldId id="271"/>
             <p14:sldId id="272"/>
@@ -1605,7 +1605,7 @@
               <a:t>Do now — retrieval. Silent, no notes, no help: recall comes before any support. Give about four minutes.
 1. How many marks is Question 5 worth?  →  C   40
 2. Weather that reflects a character’s mood is called ___ fallacy.  →  pathetic
-3. Which sentence begins with a fronted adverbial?  →  A   Silently, the fox slipped under the gate.
+3. Which sentence begins with a fronted adverbial?  →  B   Silently, the fox slipped under the gate.
 Circulate: who gets 3/3 (Stretch route), 2/3 (Core), 0–1 (Support)? Use this to route pupils later in the lesson.</a:t>
             </a:r>
             <a:endParaRPr lang="en-US" dirty="0"/>
@@ -1697,7 +1697,7 @@
               <a:t>Answers — pupils mark their own in a different colour, then hands up for 3/3, 2/3, 1/3.
 1. C   40. Question 5 is worth 40 marks: 24 for content and organisation, 16 for technical accuracy.
 2. pathetic. Pathetic fallacy uses the setting to reflect feelings.
-3. A   Silently, the fox slipped under the gate.. ‘Silently,’ comes at the front and tells us how the fox moves.
+3. B   Silently, the fox slipped under the gate.. ‘Silently,’ comes at the front and tells us how the fox moves.
 Say the route each score points to: 3/3 Stretch, 2/3 Core, 0–1 Support. Pupils may choose to move up.</a:t>
             </a:r>
             <a:endParaRPr lang="en-US" dirty="0"/>
@@ -8739,7 +8739,7 @@
                 <a:ea typeface="Calibri" pitchFamily="34" charset="-122"/>
                 <a:cs typeface="Calibri" pitchFamily="34" charset="-120"/>
               </a:rPr>
-              <a:t>24</a:t>
+              <a:t>20</a:t>
             </a:r>
             <a:endParaRPr lang="en-US" sz="2400" dirty="0"/>
           </a:p>
@@ -8813,7 +8813,7 @@
                 <a:ea typeface="Calibri" pitchFamily="34" charset="-122"/>
                 <a:cs typeface="Calibri" pitchFamily="34" charset="-120"/>
               </a:rPr>
-              <a:t>80</a:t>
+              <a:t>24</a:t>
             </a:r>
             <a:endParaRPr lang="en-US" sz="2400" dirty="0"/>
           </a:p>
@@ -8850,7 +8850,7 @@
                 <a:ea typeface="Calibri" pitchFamily="34" charset="-122"/>
                 <a:cs typeface="Calibri" pitchFamily="34" charset="-120"/>
               </a:rPr>
-              <a:t>20</a:t>
+              <a:t>80</a:t>
             </a:r>
             <a:endParaRPr lang="en-US" sz="2400" dirty="0"/>
           </a:p>
@@ -11503,7 +11503,7 @@
                 <a:ea typeface="Calibri" pitchFamily="34" charset="-122"/>
                 <a:cs typeface="Calibri" pitchFamily="34" charset="-120"/>
               </a:rPr>
-              <a:t>20</a:t>
+              <a:t>80</a:t>
             </a:r>
             <a:endParaRPr lang="en-US" sz="2400" dirty="0"/>
           </a:p>
@@ -11540,7 +11540,7 @@
                 <a:ea typeface="Calibri" pitchFamily="34" charset="-122"/>
                 <a:cs typeface="Calibri" pitchFamily="34" charset="-120"/>
               </a:rPr>
-              <a:t>24</a:t>
+              <a:t>20</a:t>
             </a:r>
             <a:endParaRPr lang="en-US" sz="2400" dirty="0"/>
           </a:p>
@@ -11614,7 +11614,7 @@
                 <a:ea typeface="Calibri" pitchFamily="34" charset="-122"/>
                 <a:cs typeface="Calibri" pitchFamily="34" charset="-120"/>
               </a:rPr>
-              <a:t>80</a:t>
+              <a:t>24</a:t>
             </a:r>
             <a:endParaRPr lang="en-US" sz="2400" dirty="0"/>
           </a:p>
@@ -12016,7 +12016,7 @@
                 <a:ea typeface="Calibri" pitchFamily="34" charset="-122"/>
                 <a:cs typeface="Calibri" pitchFamily="34" charset="-120"/>
               </a:rPr>
-              <a:t>Silently, the fox slipped under the gate.</a:t>
+              <a:t>The fox, which was hungry, slipped under the gate.</a:t>
             </a:r>
             <a:endParaRPr lang="en-US" sz="1800" dirty="0"/>
           </a:p>
@@ -12053,7 +12053,7 @@
                 <a:ea typeface="Calibri" pitchFamily="34" charset="-122"/>
                 <a:cs typeface="Calibri" pitchFamily="34" charset="-120"/>
               </a:rPr>
-              <a:t>The fox slipped under the gate.</a:t>
+              <a:t>Silently, the fox slipped under the gate.</a:t>
             </a:r>
             <a:endParaRPr lang="en-US" sz="1800" dirty="0"/>
           </a:p>
@@ -12090,7 +12090,7 @@
                 <a:ea typeface="Calibri" pitchFamily="34" charset="-122"/>
                 <a:cs typeface="Calibri" pitchFamily="34" charset="-120"/>
               </a:rPr>
-              <a:t>The fox, which was hungry, slipped under the gate.</a:t>
+              <a:t>The fox slipped under the gate.</a:t>
             </a:r>
             <a:endParaRPr lang="en-US" sz="1800" dirty="0"/>
           </a:p>
@@ -13028,7 +13028,7 @@
                 <a:ea typeface="Calibri" pitchFamily="34" charset="-122"/>
                 <a:cs typeface="Calibri" pitchFamily="34" charset="-120"/>
               </a:rPr>
-              <a:t>A   Silently, the fox slipped under the gate.</a:t>
+              <a:t>B   Silently, the fox slipped under the gate.</a:t>
             </a:r>
             <a:endParaRPr lang="en-US" sz="2200" dirty="0"/>
           </a:p>

--- a/decks/englang-p1/englang-p1_ch6_q5-writing.pptx
+++ b/decks/englang-p1/englang-p1_ch6_q5-writing.pptx
@@ -125,37 +125,37 @@
   <p:extLst>
     <p:ext uri="{521415D9-36F7-43E2-AB2F-B90AF26B5E84}">
       <p14:sectionLst xmlns:p14="http://schemas.microsoft.com/office/powerpoint/2010/main">
-        <p14:section name="Opening" id="{c5080207-5293-5729-a667-b10db4f66367}">
+        <p14:section name="Opening" id="{86cc5fe9-19e4-9ff4-08c4-689cc42eecff}">
           <p14:sldIdLst>
             <p14:sldId id="256"/>
           </p14:sldIdLst>
         </p14:section>
-        <p14:section name="Gate" id="{bcc75b28-67fa-6508-0299-8fcc9374f2e2}">
+        <p14:section name="Gate" id="{c26a7171-13ca-0235-3921-2ecded357107}">
           <p14:sldIdLst>
             <p14:sldId id="257"/>
             <p14:sldId id="258"/>
           </p14:sldIdLst>
         </p14:section>
-        <p14:section name="Pre-teach" id="{c7816925-5b99-a76b-4fd1-383ce7b2369d}">
+        <p14:section name="Pre-teach" id="{8b740905-9bb9-6a3a-1597-42c6279b4fc3}">
           <p14:sldIdLst>
             <p14:sldId id="259"/>
             <p14:sldId id="260"/>
           </p14:sldIdLst>
         </p14:section>
-        <p14:section name="Read-along" id="{a8247fda-7016-6b96-6f9f-10c64f473008}">
+        <p14:section name="Read-along" id="{d8387427-28d4-b6f9-11c9-bf3dfb864c3a}">
           <p14:sldIdLst>
             <p14:sldId id="261"/>
             <p14:sldId id="262"/>
           </p14:sldIdLst>
         </p14:section>
-        <p14:section name="Teach" id="{056a79ff-39be-808e-b58d-2f7b44ade858}">
+        <p14:section name="Teach" id="{fffdda78-c86a-2a27-461b-43ac051e7d16}">
           <p14:sldIdLst>
             <p14:sldId id="263"/>
             <p14:sldId id="264"/>
             <p14:sldId id="265"/>
           </p14:sldIdLst>
         </p14:section>
-        <p14:section name="Routes" id="{3b49e4fe-a53f-c3e1-4e49-8f43e89eb82e}">
+        <p14:section name="Routes" id="{096cc44c-8db0-8c17-1261-f947174d8665}">
           <p14:sldIdLst>
             <p14:sldId id="266"/>
             <p14:sldId id="267"/>
@@ -163,12 +163,12 @@
             <p14:sldId id="269"/>
           </p14:sldIdLst>
         </p14:section>
-        <p14:section name="Close" id="{75345b53-602a-1c4f-6e60-614cdcf99043}">
+        <p14:section name="Close" id="{d67ce7ad-0870-94c9-fe9f-85156b2bd850}">
           <p14:sldIdLst>
             <p14:sldId id="270"/>
           </p14:sldIdLst>
         </p14:section>
-        <p14:section name="Answers" id="{6c6be2f5-adb1-01aa-da73-756c159d4043}">
+        <p14:section name="Answers" id="{381ebfc5-9432-33e4-7264-b90e3b4d9676}">
           <p14:sldIdLst>
             <p14:sldId id="271"/>
             <p14:sldId id="272"/>
